--- a/Setup and Evaluation/Viva_Slides.pptx
+++ b/Setup and Evaluation/Viva_Slides.pptx
@@ -6051,7 +6051,7 @@
                 <a:ea typeface="Calibri" pitchFamily="34" charset="-122"/>
                 <a:cs typeface="Calibri" pitchFamily="34" charset="-120"/>
               </a:rPr>
-              <a:t>Spanish-language homepage  </a:t>
+              <a:t>Spanish-language option  </a:t>
             </a:r>
             <a:r>
               <a:rPr lang="en-US" sz="1350" dirty="0">
@@ -6062,7 +6062,29 @@
                 <a:ea typeface="Calibri" pitchFamily="34" charset="-122"/>
                 <a:cs typeface="Calibri" pitchFamily="34" charset="-120"/>
               </a:rPr>
-              <a:t>a full parallel-language page, not a machine-translation toggle</a:t>
+              <a:t>full parallel-language pages, not a </a:t>
+            </a:r>
+            <a:r>
+              <a:rPr lang="en-US" sz="1350" dirty="0" err="1">
+                <a:solidFill>
+                  <a:srgbClr val="1A1A2E"/>
+                </a:solidFill>
+                <a:latin typeface="Calibri" pitchFamily="34" charset="0"/>
+                <a:ea typeface="Calibri" pitchFamily="34" charset="-122"/>
+                <a:cs typeface="Calibri" pitchFamily="34" charset="-120"/>
+              </a:rPr>
+              <a:t>brower</a:t>
+            </a:r>
+            <a:r>
+              <a:rPr lang="en-US" sz="1350" dirty="0">
+                <a:solidFill>
+                  <a:srgbClr val="1A1A2E"/>
+                </a:solidFill>
+                <a:latin typeface="Calibri" pitchFamily="34" charset="0"/>
+                <a:ea typeface="Calibri" pitchFamily="34" charset="-122"/>
+                <a:cs typeface="Calibri" pitchFamily="34" charset="-120"/>
+              </a:rPr>
+              <a:t>-translation toggle</a:t>
             </a:r>
             <a:endParaRPr lang="en-US" sz="1500" dirty="0"/>
           </a:p>
@@ -6173,28 +6195,7 @@
                 <a:ea typeface="Calibri" pitchFamily="34" charset="-122"/>
                 <a:cs typeface="Calibri" pitchFamily="34" charset="-120"/>
               </a:rPr>
-              <a:t>chatbots and voice navigation excluded, since the evidence for their accessibility benefit is largely unevaluated in the </a:t>
-            </a:r>
-            <a:r>
-              <a:rPr lang="en-US" sz="1350">
-                <a:solidFill>
-                  <a:srgbClr val="1A1A2E"/>
-                </a:solidFill>
-                <a:latin typeface="Calibri" pitchFamily="34" charset="0"/>
-                <a:ea typeface="Calibri" pitchFamily="34" charset="-122"/>
-                <a:cs typeface="Calibri" pitchFamily="34" charset="-120"/>
-              </a:rPr>
-              <a:t>current </a:t>
-            </a:r>
-            <a:r>
-              <a:rPr lang="en-US" sz="1350">
-                <a:solidFill>
-                  <a:srgbClr val="1A1A2E"/>
-                </a:solidFill>
-                <a:ea typeface="Calibri" pitchFamily="34" charset="-122"/>
-                <a:cs typeface="Calibri" pitchFamily="34" charset="-120"/>
-              </a:rPr>
-              <a:t>literature (</a:t>
+              <a:t>chatbots and voice navigation excluded, since the evidence for their accessibility benefit is largely unevaluated in the current </a:t>
             </a:r>
             <a:r>
               <a:rPr lang="en-US" sz="1350" dirty="0">
@@ -6204,17 +6205,7 @@
                 <a:ea typeface="Calibri" pitchFamily="34" charset="-122"/>
                 <a:cs typeface="Calibri" pitchFamily="34" charset="-120"/>
               </a:rPr>
-              <a:t>growing body </a:t>
-            </a:r>
-            <a:r>
-              <a:rPr lang="en-US" sz="1350">
-                <a:solidFill>
-                  <a:srgbClr val="1A1A2E"/>
-                </a:solidFill>
-                <a:ea typeface="Calibri" pitchFamily="34" charset="-122"/>
-                <a:cs typeface="Calibri" pitchFamily="34" charset="-120"/>
-              </a:rPr>
-              <a:t>of research)</a:t>
+              <a:t>literature (growing body of research)</a:t>
             </a:r>
             <a:endParaRPr lang="en-US" sz="1350" dirty="0"/>
           </a:p>

--- a/Setup and Evaluation/Viva_Slides.pptx
+++ b/Setup and Evaluation/Viva_Slides.pptx
@@ -6062,29 +6062,7 @@
                 <a:ea typeface="Calibri" pitchFamily="34" charset="-122"/>
                 <a:cs typeface="Calibri" pitchFamily="34" charset="-120"/>
               </a:rPr>
-              <a:t>full parallel-language pages, not a </a:t>
-            </a:r>
-            <a:r>
-              <a:rPr lang="en-US" sz="1350" dirty="0" err="1">
-                <a:solidFill>
-                  <a:srgbClr val="1A1A2E"/>
-                </a:solidFill>
-                <a:latin typeface="Calibri" pitchFamily="34" charset="0"/>
-                <a:ea typeface="Calibri" pitchFamily="34" charset="-122"/>
-                <a:cs typeface="Calibri" pitchFamily="34" charset="-120"/>
-              </a:rPr>
-              <a:t>brower</a:t>
-            </a:r>
-            <a:r>
-              <a:rPr lang="en-US" sz="1350" dirty="0">
-                <a:solidFill>
-                  <a:srgbClr val="1A1A2E"/>
-                </a:solidFill>
-                <a:latin typeface="Calibri" pitchFamily="34" charset="0"/>
-                <a:ea typeface="Calibri" pitchFamily="34" charset="-122"/>
-                <a:cs typeface="Calibri" pitchFamily="34" charset="-120"/>
-              </a:rPr>
-              <a:t>-translation toggle</a:t>
+              <a:t>full parallel-language pages, not a browser-translation toggle</a:t>
             </a:r>
             <a:endParaRPr lang="en-US" sz="1500" dirty="0"/>
           </a:p>
